--- a/interim_project_presentation.pptx
+++ b/interim_project_presentation.pptx
@@ -8457,8 +8457,8 @@
           </a:fontRef>
         </p:style>
       </p:cxnSp>
-      <mc:AlternateContent xmlns:mc="http://schemas.openxmlformats.org/markup-compatibility/2006">
-        <mc:Choice xmlns:a14="http://schemas.microsoft.com/office/drawing/2010/main" Requires="a14">
+      <mc:AlternateContent xmlns:mc="http://schemas.openxmlformats.org/markup-compatibility/2006" xmlns:a14="http://schemas.microsoft.com/office/drawing/2010/main">
+        <mc:Choice Requires="a14">
           <p:sp>
             <p:nvSpPr>
               <p:cNvPr id="12" name="Metin Kutusu 37">
@@ -8650,7 +8650,7 @@
             </p:txBody>
           </p:sp>
         </mc:Choice>
-        <mc:Fallback>
+        <mc:Fallback xmlns="">
           <p:sp>
             <p:nvSpPr>
               <p:cNvPr id="12" name="Metin Kutusu 37">
@@ -8985,6 +8985,110 @@
           </a:p>
         </p:txBody>
       </p:sp>
+      <p:cxnSp>
+        <p:nvCxnSpPr>
+          <p:cNvPr id="8" name="Straight Arrow Connector 7">
+            <a:extLst>
+              <a:ext uri="{FF2B5EF4-FFF2-40B4-BE49-F238E27FC236}">
+                <a16:creationId xmlns:a16="http://schemas.microsoft.com/office/drawing/2014/main" id="{875122F9-39F1-5446-A963-06E7D4883551}"/>
+              </a:ext>
+            </a:extLst>
+          </p:cNvPr>
+          <p:cNvCxnSpPr>
+            <a:cxnSpLocks/>
+          </p:cNvCxnSpPr>
+          <p:nvPr/>
+        </p:nvCxnSpPr>
+        <p:spPr>
+          <a:xfrm flipH="1">
+            <a:off x="2490255" y="2185847"/>
+            <a:ext cx="388726" cy="296601"/>
+          </a:xfrm>
+          <a:prstGeom prst="straightConnector1">
+            <a:avLst/>
+          </a:prstGeom>
+          <a:ln w="22225">
+            <a:solidFill>
+              <a:schemeClr val="tx1">
+                <a:lumMod val="50000"/>
+                <a:lumOff val="50000"/>
+              </a:schemeClr>
+            </a:solidFill>
+            <a:tailEnd type="triangle"/>
+          </a:ln>
+        </p:spPr>
+        <p:style>
+          <a:lnRef idx="1">
+            <a:schemeClr val="accent1"/>
+          </a:lnRef>
+          <a:fillRef idx="0">
+            <a:schemeClr val="accent1"/>
+          </a:fillRef>
+          <a:effectRef idx="0">
+            <a:schemeClr val="accent1"/>
+          </a:effectRef>
+          <a:fontRef idx="minor">
+            <a:schemeClr val="tx1"/>
+          </a:fontRef>
+        </p:style>
+      </p:cxnSp>
+      <p:sp>
+        <p:nvSpPr>
+          <p:cNvPr id="16" name="Rectangle 15">
+            <a:extLst>
+              <a:ext uri="{FF2B5EF4-FFF2-40B4-BE49-F238E27FC236}">
+                <a16:creationId xmlns:a16="http://schemas.microsoft.com/office/drawing/2014/main" id="{9677DA72-E25C-BB43-A103-ACD98DFD1AB4}"/>
+              </a:ext>
+            </a:extLst>
+          </p:cNvPr>
+          <p:cNvSpPr/>
+          <p:nvPr/>
+        </p:nvSpPr>
+        <p:spPr>
+          <a:xfrm>
+            <a:off x="2889615" y="1881341"/>
+            <a:ext cx="576600" cy="296601"/>
+          </a:xfrm>
+          <a:prstGeom prst="rect">
+            <a:avLst/>
+          </a:prstGeom>
+          <a:solidFill>
+            <a:srgbClr val="458D7A"/>
+          </a:solidFill>
+          <a:ln>
+            <a:solidFill>
+              <a:schemeClr val="accent3"/>
+            </a:solidFill>
+          </a:ln>
+        </p:spPr>
+        <p:style>
+          <a:lnRef idx="2">
+            <a:schemeClr val="accent1">
+              <a:shade val="50000"/>
+            </a:schemeClr>
+          </a:lnRef>
+          <a:fillRef idx="1">
+            <a:schemeClr val="accent1"/>
+          </a:fillRef>
+          <a:effectRef idx="0">
+            <a:schemeClr val="accent1"/>
+          </a:effectRef>
+          <a:fontRef idx="minor">
+            <a:schemeClr val="lt1"/>
+          </a:fontRef>
+        </p:style>
+        <p:txBody>
+          <a:bodyPr rtlCol="0" anchor="ctr"/>
+          <a:lstStyle/>
+          <a:p>
+            <a:pPr algn="ctr"/>
+            <a:r>
+              <a:rPr lang="en-US" sz="600" dirty="0"/>
+              <a:t>Cross-Entropy Loss</a:t>
+            </a:r>
+          </a:p>
+        </p:txBody>
+      </p:sp>
     </p:spTree>
     <p:extLst>
       <p:ext uri="{BB962C8B-B14F-4D97-AF65-F5344CB8AC3E}">
@@ -9050,6 +9154,76 @@
                                   </p:childTnLst>
                                 </p:cTn>
                               </p:par>
+                              <p:par>
+                                <p:cTn id="8" presetID="9" presetClass="entr" presetSubtype="0" fill="hold" nodeType="withEffect">
+                                  <p:stCondLst>
+                                    <p:cond delay="0"/>
+                                  </p:stCondLst>
+                                  <p:childTnLst>
+                                    <p:set>
+                                      <p:cBhvr>
+                                        <p:cTn id="9" dur="1" fill="hold">
+                                          <p:stCondLst>
+                                            <p:cond delay="0"/>
+                                          </p:stCondLst>
+                                        </p:cTn>
+                                        <p:tgtEl>
+                                          <p:spTgt spid="8"/>
+                                        </p:tgtEl>
+                                        <p:attrNameLst>
+                                          <p:attrName>style.visibility</p:attrName>
+                                        </p:attrNameLst>
+                                      </p:cBhvr>
+                                      <p:to>
+                                        <p:strVal val="visible"/>
+                                      </p:to>
+                                    </p:set>
+                                    <p:animEffect transition="in" filter="dissolve">
+                                      <p:cBhvr>
+                                        <p:cTn id="10" dur="500"/>
+                                        <p:tgtEl>
+                                          <p:spTgt spid="8"/>
+                                        </p:tgtEl>
+                                      </p:cBhvr>
+                                    </p:animEffect>
+                                  </p:childTnLst>
+                                </p:cTn>
+                              </p:par>
+                              <p:par>
+                                <p:cTn id="11" presetID="9" presetClass="entr" presetSubtype="0" fill="hold" grpId="0" nodeType="withEffect">
+                                  <p:stCondLst>
+                                    <p:cond delay="0"/>
+                                  </p:stCondLst>
+                                  <p:childTnLst>
+                                    <p:set>
+                                      <p:cBhvr>
+                                        <p:cTn id="12" dur="1" fill="hold">
+                                          <p:stCondLst>
+                                            <p:cond delay="0"/>
+                                          </p:stCondLst>
+                                        </p:cTn>
+                                        <p:tgtEl>
+                                          <p:spTgt spid="16"/>
+                                        </p:tgtEl>
+                                        <p:attrNameLst>
+                                          <p:attrName>style.visibility</p:attrName>
+                                        </p:attrNameLst>
+                                      </p:cBhvr>
+                                      <p:to>
+                                        <p:strVal val="visible"/>
+                                      </p:to>
+                                    </p:set>
+                                    <p:animEffect transition="in" filter="dissolve">
+                                      <p:cBhvr>
+                                        <p:cTn id="13" dur="500"/>
+                                        <p:tgtEl>
+                                          <p:spTgt spid="16"/>
+                                        </p:tgtEl>
+                                      </p:cBhvr>
+                                    </p:animEffect>
+                                  </p:childTnLst>
+                                </p:cTn>
+                              </p:par>
                             </p:childTnLst>
                           </p:cTn>
                         </p:par>
@@ -9057,26 +9231,26 @@
                     </p:cTn>
                   </p:par>
                   <p:par>
-                    <p:cTn id="8" fill="hold">
+                    <p:cTn id="14" fill="hold">
                       <p:stCondLst>
                         <p:cond delay="indefinite"/>
                       </p:stCondLst>
                       <p:childTnLst>
                         <p:par>
-                          <p:cTn id="9" fill="hold">
+                          <p:cTn id="15" fill="hold">
                             <p:stCondLst>
                               <p:cond delay="0"/>
                             </p:stCondLst>
                             <p:childTnLst>
                               <p:par>
-                                <p:cTn id="10" presetID="9" presetClass="entr" presetSubtype="0" fill="hold" nodeType="clickEffect">
+                                <p:cTn id="16" presetID="9" presetClass="entr" presetSubtype="0" fill="hold" nodeType="clickEffect">
                                   <p:stCondLst>
                                     <p:cond delay="0"/>
                                   </p:stCondLst>
                                   <p:childTnLst>
                                     <p:set>
                                       <p:cBhvr>
-                                        <p:cTn id="11" dur="1" fill="hold">
+                                        <p:cTn id="17" dur="1" fill="hold">
                                           <p:stCondLst>
                                             <p:cond delay="0"/>
                                           </p:stCondLst>
@@ -9094,7 +9268,7 @@
                                     </p:set>
                                     <p:animEffect transition="in" filter="dissolve">
                                       <p:cBhvr>
-                                        <p:cTn id="12" dur="500"/>
+                                        <p:cTn id="18" dur="500"/>
                                         <p:tgtEl>
                                           <p:spTgt spid="36"/>
                                         </p:tgtEl>
@@ -9104,14 +9278,14 @@
                                 </p:cTn>
                               </p:par>
                               <p:par>
-                                <p:cTn id="13" presetID="9" presetClass="entr" presetSubtype="0" fill="hold" grpId="0" nodeType="withEffect">
+                                <p:cTn id="19" presetID="9" presetClass="entr" presetSubtype="0" fill="hold" grpId="0" nodeType="withEffect">
                                   <p:stCondLst>
                                     <p:cond delay="0"/>
                                   </p:stCondLst>
                                   <p:childTnLst>
                                     <p:set>
                                       <p:cBhvr>
-                                        <p:cTn id="14" dur="1" fill="hold">
+                                        <p:cTn id="20" dur="1" fill="hold">
                                           <p:stCondLst>
                                             <p:cond delay="0"/>
                                           </p:stCondLst>
@@ -9129,7 +9303,7 @@
                                     </p:set>
                                     <p:animEffect transition="in" filter="dissolve">
                                       <p:cBhvr>
-                                        <p:cTn id="15" dur="500"/>
+                                        <p:cTn id="21" dur="500"/>
                                         <p:tgtEl>
                                           <p:spTgt spid="34"/>
                                         </p:tgtEl>
@@ -9139,14 +9313,14 @@
                                 </p:cTn>
                               </p:par>
                               <p:par>
-                                <p:cTn id="16" presetID="9" presetClass="entr" presetSubtype="0" fill="hold" nodeType="withEffect">
+                                <p:cTn id="22" presetID="9" presetClass="entr" presetSubtype="0" fill="hold" nodeType="withEffect">
                                   <p:stCondLst>
                                     <p:cond delay="0"/>
                                   </p:stCondLst>
                                   <p:childTnLst>
                                     <p:set>
                                       <p:cBhvr>
-                                        <p:cTn id="17" dur="1" fill="hold">
+                                        <p:cTn id="23" dur="1" fill="hold">
                                           <p:stCondLst>
                                             <p:cond delay="0"/>
                                           </p:stCondLst>
@@ -9164,7 +9338,7 @@
                                     </p:set>
                                     <p:animEffect transition="in" filter="dissolve">
                                       <p:cBhvr>
-                                        <p:cTn id="18" dur="500"/>
+                                        <p:cTn id="24" dur="500"/>
                                         <p:tgtEl>
                                           <p:spTgt spid="4"/>
                                         </p:tgtEl>
@@ -9180,26 +9354,26 @@
                     </p:cTn>
                   </p:par>
                   <p:par>
-                    <p:cTn id="19" fill="hold">
+                    <p:cTn id="25" fill="hold">
                       <p:stCondLst>
                         <p:cond delay="indefinite"/>
                       </p:stCondLst>
                       <p:childTnLst>
                         <p:par>
-                          <p:cTn id="20" fill="hold">
+                          <p:cTn id="26" fill="hold">
                             <p:stCondLst>
                               <p:cond delay="0"/>
                             </p:stCondLst>
                             <p:childTnLst>
                               <p:par>
-                                <p:cTn id="21" presetID="9" presetClass="entr" presetSubtype="0" fill="hold" grpId="0" nodeType="clickEffect">
+                                <p:cTn id="27" presetID="9" presetClass="entr" presetSubtype="0" fill="hold" grpId="0" nodeType="clickEffect">
                                   <p:stCondLst>
                                     <p:cond delay="0"/>
                                   </p:stCondLst>
                                   <p:childTnLst>
                                     <p:set>
                                       <p:cBhvr>
-                                        <p:cTn id="22" dur="1" fill="hold">
+                                        <p:cTn id="28" dur="1" fill="hold">
                                           <p:stCondLst>
                                             <p:cond delay="0"/>
                                           </p:stCondLst>
@@ -9217,7 +9391,7 @@
                                     </p:set>
                                     <p:animEffect transition="in" filter="dissolve">
                                       <p:cBhvr>
-                                        <p:cTn id="23" dur="500"/>
+                                        <p:cTn id="29" dur="500"/>
                                         <p:tgtEl>
                                           <p:spTgt spid="15"/>
                                         </p:tgtEl>
@@ -9227,14 +9401,14 @@
                                 </p:cTn>
                               </p:par>
                               <p:par>
-                                <p:cTn id="24" presetID="9" presetClass="entr" presetSubtype="0" fill="hold" nodeType="withEffect">
+                                <p:cTn id="30" presetID="9" presetClass="entr" presetSubtype="0" fill="hold" nodeType="withEffect">
                                   <p:stCondLst>
                                     <p:cond delay="0"/>
                                   </p:stCondLst>
                                   <p:childTnLst>
                                     <p:set>
                                       <p:cBhvr>
-                                        <p:cTn id="25" dur="1" fill="hold">
+                                        <p:cTn id="31" dur="1" fill="hold">
                                           <p:stCondLst>
                                             <p:cond delay="0"/>
                                           </p:stCondLst>
@@ -9252,7 +9426,7 @@
                                     </p:set>
                                     <p:animEffect transition="in" filter="dissolve">
                                       <p:cBhvr>
-                                        <p:cTn id="26" dur="500"/>
+                                        <p:cTn id="32" dur="500"/>
                                         <p:tgtEl>
                                           <p:spTgt spid="6"/>
                                         </p:tgtEl>
@@ -9262,14 +9436,14 @@
                                 </p:cTn>
                               </p:par>
                               <p:par>
-                                <p:cTn id="27" presetID="9" presetClass="entr" presetSubtype="0" fill="hold" nodeType="withEffect">
+                                <p:cTn id="33" presetID="9" presetClass="entr" presetSubtype="0" fill="hold" nodeType="withEffect">
                                   <p:stCondLst>
                                     <p:cond delay="0"/>
                                   </p:stCondLst>
                                   <p:childTnLst>
                                     <p:set>
                                       <p:cBhvr>
-                                        <p:cTn id="28" dur="1" fill="hold">
+                                        <p:cTn id="34" dur="1" fill="hold">
                                           <p:stCondLst>
                                             <p:cond delay="0"/>
                                           </p:stCondLst>
@@ -9287,7 +9461,7 @@
                                     </p:set>
                                     <p:animEffect transition="in" filter="dissolve">
                                       <p:cBhvr>
-                                        <p:cTn id="29" dur="500"/>
+                                        <p:cTn id="35" dur="500"/>
                                         <p:tgtEl>
                                           <p:spTgt spid="3"/>
                                         </p:tgtEl>
@@ -9303,26 +9477,26 @@
                     </p:cTn>
                   </p:par>
                   <p:par>
-                    <p:cTn id="30" fill="hold">
+                    <p:cTn id="36" fill="hold">
                       <p:stCondLst>
                         <p:cond delay="indefinite"/>
                       </p:stCondLst>
                       <p:childTnLst>
                         <p:par>
-                          <p:cTn id="31" fill="hold">
+                          <p:cTn id="37" fill="hold">
                             <p:stCondLst>
                               <p:cond delay="0"/>
                             </p:stCondLst>
                             <p:childTnLst>
                               <p:par>
-                                <p:cTn id="32" presetID="9" presetClass="entr" presetSubtype="0" fill="hold" grpId="0" nodeType="clickEffect">
+                                <p:cTn id="38" presetID="9" presetClass="entr" presetSubtype="0" fill="hold" grpId="0" nodeType="clickEffect">
                                   <p:stCondLst>
                                     <p:cond delay="0"/>
                                   </p:stCondLst>
                                   <p:childTnLst>
                                     <p:set>
                                       <p:cBhvr>
-                                        <p:cTn id="33" dur="1" fill="hold">
+                                        <p:cTn id="39" dur="1" fill="hold">
                                           <p:stCondLst>
                                             <p:cond delay="0"/>
                                           </p:stCondLst>
@@ -9340,7 +9514,7 @@
                                     </p:set>
                                     <p:animEffect transition="in" filter="dissolve">
                                       <p:cBhvr>
-                                        <p:cTn id="34" dur="500"/>
+                                        <p:cTn id="40" dur="500"/>
                                         <p:tgtEl>
                                           <p:spTgt spid="14"/>
                                         </p:tgtEl>
@@ -9350,14 +9524,14 @@
                                 </p:cTn>
                               </p:par>
                               <p:par>
-                                <p:cTn id="35" presetID="9" presetClass="entr" presetSubtype="0" fill="hold" nodeType="withEffect">
+                                <p:cTn id="41" presetID="9" presetClass="entr" presetSubtype="0" fill="hold" nodeType="withEffect">
                                   <p:stCondLst>
                                     <p:cond delay="0"/>
                                   </p:stCondLst>
                                   <p:childTnLst>
                                     <p:set>
                                       <p:cBhvr>
-                                        <p:cTn id="36" dur="1" fill="hold">
+                                        <p:cTn id="42" dur="1" fill="hold">
                                           <p:stCondLst>
                                             <p:cond delay="0"/>
                                           </p:stCondLst>
@@ -9375,7 +9549,7 @@
                                     </p:set>
                                     <p:animEffect transition="in" filter="dissolve">
                                       <p:cBhvr>
-                                        <p:cTn id="37" dur="500"/>
+                                        <p:cTn id="43" dur="500"/>
                                         <p:tgtEl>
                                           <p:spTgt spid="17"/>
                                         </p:tgtEl>
@@ -9385,14 +9559,14 @@
                                 </p:cTn>
                               </p:par>
                               <p:par>
-                                <p:cTn id="38" presetID="9" presetClass="entr" presetSubtype="0" fill="hold" grpId="0" nodeType="withEffect">
+                                <p:cTn id="44" presetID="9" presetClass="entr" presetSubtype="0" fill="hold" grpId="0" nodeType="withEffect">
                                   <p:stCondLst>
                                     <p:cond delay="0"/>
                                   </p:stCondLst>
                                   <p:childTnLst>
                                     <p:set>
                                       <p:cBhvr>
-                                        <p:cTn id="39" dur="1" fill="hold">
+                                        <p:cTn id="45" dur="1" fill="hold">
                                           <p:stCondLst>
                                             <p:cond delay="0"/>
                                           </p:stCondLst>
@@ -9410,79 +9584,9 @@
                                     </p:set>
                                     <p:animEffect transition="in" filter="dissolve">
                                       <p:cBhvr>
-                                        <p:cTn id="40" dur="500"/>
+                                        <p:cTn id="46" dur="500"/>
                                         <p:tgtEl>
                                           <p:spTgt spid="13"/>
-                                        </p:tgtEl>
-                                      </p:cBhvr>
-                                    </p:animEffect>
-                                  </p:childTnLst>
-                                </p:cTn>
-                              </p:par>
-                              <p:par>
-                                <p:cTn id="41" presetID="9" presetClass="entr" presetSubtype="0" fill="hold" grpId="0" nodeType="withEffect">
-                                  <p:stCondLst>
-                                    <p:cond delay="0"/>
-                                  </p:stCondLst>
-                                  <p:childTnLst>
-                                    <p:set>
-                                      <p:cBhvr>
-                                        <p:cTn id="42" dur="1" fill="hold">
-                                          <p:stCondLst>
-                                            <p:cond delay="0"/>
-                                          </p:stCondLst>
-                                        </p:cTn>
-                                        <p:tgtEl>
-                                          <p:spTgt spid="18"/>
-                                        </p:tgtEl>
-                                        <p:attrNameLst>
-                                          <p:attrName>style.visibility</p:attrName>
-                                        </p:attrNameLst>
-                                      </p:cBhvr>
-                                      <p:to>
-                                        <p:strVal val="visible"/>
-                                      </p:to>
-                                    </p:set>
-                                    <p:animEffect transition="in" filter="dissolve">
-                                      <p:cBhvr>
-                                        <p:cTn id="43" dur="500"/>
-                                        <p:tgtEl>
-                                          <p:spTgt spid="18"/>
-                                        </p:tgtEl>
-                                      </p:cBhvr>
-                                    </p:animEffect>
-                                  </p:childTnLst>
-                                </p:cTn>
-                              </p:par>
-                              <p:par>
-                                <p:cTn id="44" presetID="9" presetClass="entr" presetSubtype="0" fill="hold" nodeType="withEffect">
-                                  <p:stCondLst>
-                                    <p:cond delay="0"/>
-                                  </p:stCondLst>
-                                  <p:childTnLst>
-                                    <p:set>
-                                      <p:cBhvr>
-                                        <p:cTn id="45" dur="1" fill="hold">
-                                          <p:stCondLst>
-                                            <p:cond delay="0"/>
-                                          </p:stCondLst>
-                                        </p:cTn>
-                                        <p:tgtEl>
-                                          <p:spTgt spid="9"/>
-                                        </p:tgtEl>
-                                        <p:attrNameLst>
-                                          <p:attrName>style.visibility</p:attrName>
-                                        </p:attrNameLst>
-                                      </p:cBhvr>
-                                      <p:to>
-                                        <p:strVal val="visible"/>
-                                      </p:to>
-                                    </p:set>
-                                    <p:animEffect transition="in" filter="dissolve">
-                                      <p:cBhvr>
-                                        <p:cTn id="46" dur="500"/>
-                                        <p:tgtEl>
-                                          <p:spTgt spid="9"/>
                                         </p:tgtEl>
                                       </p:cBhvr>
                                     </p:animEffect>
@@ -9503,7 +9607,7 @@
                                           </p:stCondLst>
                                         </p:cTn>
                                         <p:tgtEl>
-                                          <p:spTgt spid="11"/>
+                                          <p:spTgt spid="18"/>
                                         </p:tgtEl>
                                         <p:attrNameLst>
                                           <p:attrName>style.visibility</p:attrName>
@@ -9517,7 +9621,7 @@
                                       <p:cBhvr>
                                         <p:cTn id="49" dur="500"/>
                                         <p:tgtEl>
-                                          <p:spTgt spid="11"/>
+                                          <p:spTgt spid="18"/>
                                         </p:tgtEl>
                                       </p:cBhvr>
                                     </p:animEffect>
@@ -9525,7 +9629,7 @@
                                 </p:cTn>
                               </p:par>
                               <p:par>
-                                <p:cTn id="50" presetID="9" presetClass="entr" presetSubtype="0" fill="hold" grpId="0" nodeType="withEffect">
+                                <p:cTn id="50" presetID="9" presetClass="entr" presetSubtype="0" fill="hold" nodeType="withEffect">
                                   <p:stCondLst>
                                     <p:cond delay="0"/>
                                   </p:stCondLst>
@@ -9538,7 +9642,7 @@
                                           </p:stCondLst>
                                         </p:cTn>
                                         <p:tgtEl>
-                                          <p:spTgt spid="12"/>
+                                          <p:spTgt spid="9"/>
                                         </p:tgtEl>
                                         <p:attrNameLst>
                                           <p:attrName>style.visibility</p:attrName>
@@ -9552,7 +9656,7 @@
                                       <p:cBhvr>
                                         <p:cTn id="52" dur="500"/>
                                         <p:tgtEl>
-                                          <p:spTgt spid="12"/>
+                                          <p:spTgt spid="9"/>
                                         </p:tgtEl>
                                       </p:cBhvr>
                                     </p:animEffect>
@@ -9573,6 +9677,76 @@
                                           </p:stCondLst>
                                         </p:cTn>
                                         <p:tgtEl>
+                                          <p:spTgt spid="11"/>
+                                        </p:tgtEl>
+                                        <p:attrNameLst>
+                                          <p:attrName>style.visibility</p:attrName>
+                                        </p:attrNameLst>
+                                      </p:cBhvr>
+                                      <p:to>
+                                        <p:strVal val="visible"/>
+                                      </p:to>
+                                    </p:set>
+                                    <p:animEffect transition="in" filter="dissolve">
+                                      <p:cBhvr>
+                                        <p:cTn id="55" dur="500"/>
+                                        <p:tgtEl>
+                                          <p:spTgt spid="11"/>
+                                        </p:tgtEl>
+                                      </p:cBhvr>
+                                    </p:animEffect>
+                                  </p:childTnLst>
+                                </p:cTn>
+                              </p:par>
+                              <p:par>
+                                <p:cTn id="56" presetID="9" presetClass="entr" presetSubtype="0" fill="hold" grpId="0" nodeType="withEffect">
+                                  <p:stCondLst>
+                                    <p:cond delay="0"/>
+                                  </p:stCondLst>
+                                  <p:childTnLst>
+                                    <p:set>
+                                      <p:cBhvr>
+                                        <p:cTn id="57" dur="1" fill="hold">
+                                          <p:stCondLst>
+                                            <p:cond delay="0"/>
+                                          </p:stCondLst>
+                                        </p:cTn>
+                                        <p:tgtEl>
+                                          <p:spTgt spid="12"/>
+                                        </p:tgtEl>
+                                        <p:attrNameLst>
+                                          <p:attrName>style.visibility</p:attrName>
+                                        </p:attrNameLst>
+                                      </p:cBhvr>
+                                      <p:to>
+                                        <p:strVal val="visible"/>
+                                      </p:to>
+                                    </p:set>
+                                    <p:animEffect transition="in" filter="dissolve">
+                                      <p:cBhvr>
+                                        <p:cTn id="58" dur="500"/>
+                                        <p:tgtEl>
+                                          <p:spTgt spid="12"/>
+                                        </p:tgtEl>
+                                      </p:cBhvr>
+                                    </p:animEffect>
+                                  </p:childTnLst>
+                                </p:cTn>
+                              </p:par>
+                              <p:par>
+                                <p:cTn id="59" presetID="9" presetClass="entr" presetSubtype="0" fill="hold" grpId="0" nodeType="withEffect">
+                                  <p:stCondLst>
+                                    <p:cond delay="0"/>
+                                  </p:stCondLst>
+                                  <p:childTnLst>
+                                    <p:set>
+                                      <p:cBhvr>
+                                        <p:cTn id="60" dur="1" fill="hold">
+                                          <p:stCondLst>
+                                            <p:cond delay="0"/>
+                                          </p:stCondLst>
+                                        </p:cTn>
+                                        <p:tgtEl>
                                           <p:spTgt spid="2"/>
                                         </p:tgtEl>
                                         <p:attrNameLst>
@@ -9585,7 +9759,7 @@
                                     </p:set>
                                     <p:animEffect transition="in" filter="dissolve">
                                       <p:cBhvr>
-                                        <p:cTn id="55" dur="500"/>
+                                        <p:cTn id="61" dur="500"/>
                                         <p:tgtEl>
                                           <p:spTgt spid="2"/>
                                         </p:tgtEl>
@@ -9630,6 +9804,7 @@
       <p:bldP spid="18" grpId="0"/>
       <p:bldP spid="14" grpId="0" animBg="1"/>
       <p:bldP spid="2" grpId="0" animBg="1"/>
+      <p:bldP spid="16" grpId="0" animBg="1"/>
     </p:bldLst>
   </p:timing>
 </p:sld>
@@ -11717,33 +11892,15 @@
                                   </p:childTnLst>
                                 </p:cTn>
                               </p:par>
-                            </p:childTnLst>
-                          </p:cTn>
-                        </p:par>
-                      </p:childTnLst>
-                    </p:cTn>
-                  </p:par>
-                  <p:par>
-                    <p:cTn id="21" fill="hold">
-                      <p:stCondLst>
-                        <p:cond delay="indefinite"/>
-                      </p:stCondLst>
-                      <p:childTnLst>
-                        <p:par>
-                          <p:cTn id="22" fill="hold">
-                            <p:stCondLst>
-                              <p:cond delay="0"/>
-                            </p:stCondLst>
-                            <p:childTnLst>
                               <p:par>
-                                <p:cTn id="23" presetID="9" presetClass="entr" presetSubtype="0" fill="hold" grpId="0" nodeType="clickEffect">
+                                <p:cTn id="21" presetID="9" presetClass="entr" presetSubtype="0" fill="hold" grpId="0" nodeType="withEffect">
                                   <p:stCondLst>
                                     <p:cond delay="0"/>
                                   </p:stCondLst>
                                   <p:childTnLst>
                                     <p:set>
                                       <p:cBhvr>
-                                        <p:cTn id="24" dur="1" fill="hold">
+                                        <p:cTn id="22" dur="1" fill="hold">
                                           <p:stCondLst>
                                             <p:cond delay="0"/>
                                           </p:stCondLst>
@@ -11761,7 +11918,7 @@
                                     </p:set>
                                     <p:animEffect transition="in" filter="dissolve">
                                       <p:cBhvr>
-                                        <p:cTn id="25" dur="500"/>
+                                        <p:cTn id="23" dur="500"/>
                                         <p:tgtEl>
                                           <p:spTgt spid="2"/>
                                         </p:tgtEl>
@@ -11771,14 +11928,14 @@
                                 </p:cTn>
                               </p:par>
                               <p:par>
-                                <p:cTn id="26" presetID="9" presetClass="entr" presetSubtype="0" fill="hold" nodeType="withEffect">
+                                <p:cTn id="24" presetID="9" presetClass="entr" presetSubtype="0" fill="hold" nodeType="withEffect">
                                   <p:stCondLst>
                                     <p:cond delay="0"/>
                                   </p:stCondLst>
                                   <p:childTnLst>
                                     <p:set>
                                       <p:cBhvr>
-                                        <p:cTn id="27" dur="1" fill="hold">
+                                        <p:cTn id="25" dur="1" fill="hold">
                                           <p:stCondLst>
                                             <p:cond delay="0"/>
                                           </p:stCondLst>
@@ -11796,7 +11953,7 @@
                                     </p:set>
                                     <p:animEffect transition="in" filter="dissolve">
                                       <p:cBhvr>
-                                        <p:cTn id="28" dur="500"/>
+                                        <p:cTn id="26" dur="500"/>
                                         <p:tgtEl>
                                           <p:spTgt spid="4"/>
                                         </p:tgtEl>
@@ -11806,14 +11963,14 @@
                                 </p:cTn>
                               </p:par>
                               <p:par>
-                                <p:cTn id="29" presetID="9" presetClass="entr" presetSubtype="0" fill="hold" grpId="0" nodeType="withEffect">
+                                <p:cTn id="27" presetID="9" presetClass="entr" presetSubtype="0" fill="hold" grpId="0" nodeType="withEffect">
                                   <p:stCondLst>
                                     <p:cond delay="0"/>
                                   </p:stCondLst>
                                   <p:childTnLst>
                                     <p:set>
                                       <p:cBhvr>
-                                        <p:cTn id="30" dur="1" fill="hold">
+                                        <p:cTn id="28" dur="1" fill="hold">
                                           <p:stCondLst>
                                             <p:cond delay="0"/>
                                           </p:stCondLst>
@@ -11831,9 +11988,44 @@
                                     </p:set>
                                     <p:animEffect transition="in" filter="dissolve">
                                       <p:cBhvr>
-                                        <p:cTn id="31" dur="500"/>
+                                        <p:cTn id="29" dur="500"/>
                                         <p:tgtEl>
                                           <p:spTgt spid="11"/>
+                                        </p:tgtEl>
+                                      </p:cBhvr>
+                                    </p:animEffect>
+                                  </p:childTnLst>
+                                </p:cTn>
+                              </p:par>
+                              <p:par>
+                                <p:cTn id="30" presetID="9" presetClass="entr" presetSubtype="0" fill="hold" grpId="0" nodeType="withEffect">
+                                  <p:stCondLst>
+                                    <p:cond delay="0"/>
+                                  </p:stCondLst>
+                                  <p:childTnLst>
+                                    <p:set>
+                                      <p:cBhvr>
+                                        <p:cTn id="31" dur="1" fill="hold">
+                                          <p:stCondLst>
+                                            <p:cond delay="0"/>
+                                          </p:stCondLst>
+                                        </p:cTn>
+                                        <p:tgtEl>
+                                          <p:spTgt spid="29"/>
+                                        </p:tgtEl>
+                                        <p:attrNameLst>
+                                          <p:attrName>style.visibility</p:attrName>
+                                        </p:attrNameLst>
+                                      </p:cBhvr>
+                                      <p:to>
+                                        <p:strVal val="visible"/>
+                                      </p:to>
+                                    </p:set>
+                                    <p:animEffect transition="in" filter="dissolve">
+                                      <p:cBhvr>
+                                        <p:cTn id="32" dur="500"/>
+                                        <p:tgtEl>
+                                          <p:spTgt spid="29"/>
                                         </p:tgtEl>
                                       </p:cBhvr>
                                     </p:animEffect>
@@ -11872,6 +12064,7 @@
       <p:bldP spid="9" grpId="0" animBg="1"/>
       <p:bldP spid="11" grpId="0" animBg="1"/>
       <p:bldP spid="2" grpId="0" animBg="1"/>
+      <p:bldP spid="29" grpId="0"/>
     </p:bldLst>
   </p:timing>
 </p:sld>
@@ -11922,8 +12115,8 @@
           </a:p>
         </p:txBody>
       </p:sp>
-      <mc:AlternateContent xmlns:mc="http://schemas.openxmlformats.org/markup-compatibility/2006">
-        <mc:Choice xmlns:a14="http://schemas.microsoft.com/office/drawing/2010/main" Requires="a14">
+      <mc:AlternateContent xmlns:mc="http://schemas.openxmlformats.org/markup-compatibility/2006" xmlns:a14="http://schemas.microsoft.com/office/drawing/2010/main">
+        <mc:Choice Requires="a14">
           <p:sp>
             <p:nvSpPr>
               <p:cNvPr id="2" name="Dikdörtgen 1">
@@ -13064,7 +13257,6 @@
                 </a:endParaRPr>
               </a:p>
               <a:p>
-                <a:pPr/>
                 <a:endParaRPr lang="tr-TR" sz="1400" i="1" dirty="0">
                   <a:solidFill>
                     <a:schemeClr val="bg1"/>
@@ -13073,7 +13265,6 @@
                 </a:endParaRPr>
               </a:p>
               <a:p>
-                <a:pPr/>
                 <a:r>
                   <a:rPr lang="tr-TR" sz="1400" i="1" dirty="0">
                     <a:solidFill>
@@ -13348,7 +13539,7 @@
             </p:txBody>
           </p:sp>
         </mc:Choice>
-        <mc:Fallback>
+        <mc:Fallback xmlns="">
           <p:sp>
             <p:nvSpPr>
               <p:cNvPr id="2" name="Dikdörtgen 1">
@@ -13398,8 +13589,8 @@
           </p:sp>
         </mc:Fallback>
       </mc:AlternateContent>
-      <mc:AlternateContent xmlns:mc="http://schemas.openxmlformats.org/markup-compatibility/2006">
-        <mc:Choice xmlns:a14="http://schemas.microsoft.com/office/drawing/2010/main" Requires="a14">
+      <mc:AlternateContent xmlns:mc="http://schemas.openxmlformats.org/markup-compatibility/2006" xmlns:a14="http://schemas.microsoft.com/office/drawing/2010/main">
+        <mc:Choice Requires="a14">
           <p:sp>
             <p:nvSpPr>
               <p:cNvPr id="3" name="Dikdörtgen 2">
@@ -13432,6 +13623,7 @@
               </a:bodyPr>
               <a:lstStyle/>
               <a:p>
+                <a:pPr/>
                 <a14:m>
                   <m:oMathPara xmlns:m="http://schemas.openxmlformats.org/officeDocument/2006/math">
                     <m:oMathParaPr>
@@ -14106,7 +14298,7 @@
             </p:txBody>
           </p:sp>
         </mc:Choice>
-        <mc:Fallback>
+        <mc:Fallback xmlns="">
           <p:sp>
             <p:nvSpPr>
               <p:cNvPr id="3" name="Dikdörtgen 2">
@@ -14156,8 +14348,8 @@
           </p:sp>
         </mc:Fallback>
       </mc:AlternateContent>
-      <mc:AlternateContent xmlns:mc="http://schemas.openxmlformats.org/markup-compatibility/2006" xmlns:a14="http://schemas.microsoft.com/office/drawing/2010/main">
-        <mc:Choice Requires="a14">
+      <mc:AlternateContent xmlns:mc="http://schemas.openxmlformats.org/markup-compatibility/2006">
+        <mc:Choice xmlns:a14="http://schemas.microsoft.com/office/drawing/2010/main" Requires="a14">
           <p:sp>
             <p:nvSpPr>
               <p:cNvPr id="6" name="Dikdörtgen 5">
@@ -14172,8 +14364,8 @@
             </p:nvSpPr>
             <p:spPr>
               <a:xfrm>
-                <a:off x="4523248" y="1037495"/>
-                <a:ext cx="3491597" cy="814197"/>
+                <a:off x="4501982" y="1037495"/>
+                <a:ext cx="3903056" cy="619978"/>
               </a:xfrm>
               <a:prstGeom prst="rect">
                 <a:avLst/>
@@ -14186,457 +14378,481 @@
               <a:lstStyle/>
               <a:p>
                 <a:pPr/>
+                <a:r>
+                  <a:rPr lang="tr-TR" dirty="0">
+                    <a:solidFill>
+                      <a:schemeClr val="bg1"/>
+                    </a:solidFill>
+                  </a:rPr>
+                  <a:t>f(</a:t>
+                </a:r>
                 <a14:m>
-                  <m:oMathPara xmlns:m="http://schemas.openxmlformats.org/officeDocument/2006/math">
-                    <m:oMathParaPr>
-                      <m:jc m:val="centerGroup"/>
-                    </m:oMathParaPr>
-                    <m:oMath xmlns:m="http://schemas.openxmlformats.org/officeDocument/2006/math">
-                      <m:func>
-                        <m:funcPr>
-                          <m:ctrlPr>
-                            <a:rPr lang="tr-TR" i="1" smtClean="0">
-                              <a:solidFill>
-                                <a:schemeClr val="bg1"/>
-                              </a:solidFill>
-                              <a:latin typeface="Cambria Math" panose="02040503050406030204" pitchFamily="18" charset="0"/>
-                            </a:rPr>
-                          </m:ctrlPr>
-                        </m:funcPr>
-                        <m:fName>
-                          <m:limLow>
-                            <m:limLowPr>
-                              <m:ctrlPr>
-                                <a:rPr lang="tr-TR" i="1">
-                                  <a:solidFill>
-                                    <a:schemeClr val="bg1"/>
-                                  </a:solidFill>
-                                  <a:latin typeface="Cambria Math" panose="02040503050406030204" pitchFamily="18" charset="0"/>
-                                </a:rPr>
-                              </m:ctrlPr>
-                            </m:limLowPr>
-                            <m:e>
-                              <m:r>
-                                <m:rPr>
-                                  <m:sty m:val="p"/>
-                                </m:rPr>
-                                <a:rPr lang="tr-TR">
-                                  <a:solidFill>
-                                    <a:schemeClr val="bg1"/>
-                                  </a:solidFill>
-                                  <a:latin typeface="Cambria Math" panose="02040503050406030204" pitchFamily="18" charset="0"/>
-                                </a:rPr>
-                                <m:t>min</m:t>
-                              </m:r>
-                            </m:e>
-                            <m:lim>
-                              <m:r>
-                                <a:rPr lang="tr-TR" i="1">
-                                  <a:solidFill>
-                                    <a:schemeClr val="bg1"/>
-                                  </a:solidFill>
-                                  <a:latin typeface="Cambria Math" panose="02040503050406030204" pitchFamily="18" charset="0"/>
-                                </a:rPr>
-                                <m:t>𝜃</m:t>
-                              </m:r>
-                            </m:lim>
-                          </m:limLow>
-                        </m:fName>
-                        <m:e>
-                          <m:nary>
-                            <m:naryPr>
-                              <m:chr m:val="∑"/>
-                              <m:limLoc m:val="undOvr"/>
-                              <m:supHide m:val="on"/>
-                              <m:ctrlPr>
-                                <a:rPr lang="tr-TR" i="1">
-                                  <a:solidFill>
-                                    <a:schemeClr val="bg1"/>
-                                  </a:solidFill>
-                                  <a:latin typeface="Cambria Math" panose="02040503050406030204" pitchFamily="18" charset="0"/>
-                                </a:rPr>
-                              </m:ctrlPr>
-                            </m:naryPr>
-                            <m:sub>
-                              <m:d>
-                                <m:dPr>
-                                  <m:ctrlPr>
-                                    <a:rPr lang="tr-TR" i="1">
-                                      <a:solidFill>
-                                        <a:schemeClr val="bg1"/>
-                                      </a:solidFill>
-                                      <a:latin typeface="Cambria Math" panose="02040503050406030204" pitchFamily="18" charset="0"/>
-                                    </a:rPr>
-                                  </m:ctrlPr>
-                                </m:dPr>
-                                <m:e>
-                                  <m:r>
-                                    <a:rPr lang="tr-TR" i="1">
-                                      <a:solidFill>
-                                        <a:schemeClr val="bg1"/>
-                                      </a:solidFill>
-                                      <a:latin typeface="Cambria Math" panose="02040503050406030204" pitchFamily="18" charset="0"/>
-                                    </a:rPr>
-                                    <m:t>𝑥</m:t>
-                                  </m:r>
-                                  <m:r>
-                                    <a:rPr lang="tr-TR" i="0">
-                                      <a:solidFill>
-                                        <a:schemeClr val="bg1"/>
-                                      </a:solidFill>
-                                      <a:latin typeface="Cambria Math" panose="02040503050406030204" pitchFamily="18" charset="0"/>
-                                    </a:rPr>
-                                    <m:t>,</m:t>
-                                  </m:r>
-                                  <m:r>
-                                    <a:rPr lang="tr-TR" b="0" i="1" smtClean="0">
-                                      <a:solidFill>
-                                        <a:schemeClr val="bg1"/>
-                                      </a:solidFill>
-                                      <a:latin typeface="Cambria Math" panose="02040503050406030204" pitchFamily="18" charset="0"/>
-                                    </a:rPr>
-                                    <m:t>𝑦</m:t>
-                                  </m:r>
-                                </m:e>
-                              </m:d>
-                            </m:sub>
-                            <m:sup/>
-                            <m:e>
-                              <m:d>
-                                <m:dPr>
-                                  <m:ctrlPr>
-                                    <a:rPr lang="tr-TR" i="1">
-                                      <a:solidFill>
-                                        <a:schemeClr val="bg1"/>
-                                      </a:solidFill>
-                                      <a:latin typeface="Cambria Math" panose="02040503050406030204" pitchFamily="18" charset="0"/>
-                                    </a:rPr>
-                                  </m:ctrlPr>
-                                </m:dPr>
-                                <m:e>
-                                  <m:r>
-                                    <a:rPr lang="tr-TR">
-                                      <a:solidFill>
-                                        <a:schemeClr val="bg1"/>
-                                      </a:solidFill>
-                                      <a:latin typeface="Cambria Math" panose="02040503050406030204" pitchFamily="18" charset="0"/>
-                                    </a:rPr>
-                                    <m:t>−</m:t>
-                                  </m:r>
-                                  <m:r>
-                                    <m:rPr>
-                                      <m:sty m:val="p"/>
-                                    </m:rPr>
-                                    <a:rPr lang="tr-TR">
-                                      <a:solidFill>
-                                        <a:schemeClr val="bg1"/>
-                                      </a:solidFill>
-                                      <a:latin typeface="Cambria Math" panose="02040503050406030204" pitchFamily="18" charset="0"/>
-                                    </a:rPr>
-                                    <m:t>lo</m:t>
-                                  </m:r>
-                                  <m:func>
-                                    <m:funcPr>
-                                      <m:ctrlPr>
-                                        <a:rPr lang="tr-TR" i="1">
-                                          <a:solidFill>
-                                            <a:schemeClr val="bg1"/>
-                                          </a:solidFill>
-                                          <a:latin typeface="Cambria Math" panose="02040503050406030204" pitchFamily="18" charset="0"/>
-                                        </a:rPr>
-                                      </m:ctrlPr>
-                                    </m:funcPr>
-                                    <m:fName>
-                                      <m:r>
-                                        <m:rPr>
-                                          <m:sty m:val="p"/>
-                                        </m:rPr>
-                                        <a:rPr lang="tr-TR">
-                                          <a:solidFill>
-                                            <a:schemeClr val="bg1"/>
-                                          </a:solidFill>
-                                          <a:latin typeface="Cambria Math" panose="02040503050406030204" pitchFamily="18" charset="0"/>
-                                        </a:rPr>
-                                        <m:t>g</m:t>
-                                      </m:r>
-                                    </m:fName>
-                                    <m:e>
-                                      <m:r>
-                                        <a:rPr lang="tr-TR">
-                                          <a:solidFill>
-                                            <a:schemeClr val="bg1"/>
-                                          </a:solidFill>
-                                          <a:latin typeface="Cambria Math" panose="02040503050406030204" pitchFamily="18" charset="0"/>
-                                        </a:rPr>
-                                        <m:t>(</m:t>
-                                      </m:r>
-                                    </m:e>
-                                  </m:func>
-                                  <m:f>
-                                    <m:fPr>
-                                      <m:ctrlPr>
-                                        <a:rPr lang="tr-TR" i="1">
-                                          <a:solidFill>
-                                            <a:schemeClr val="bg1"/>
-                                          </a:solidFill>
-                                          <a:latin typeface="Cambria Math" panose="02040503050406030204" pitchFamily="18" charset="0"/>
-                                        </a:rPr>
-                                      </m:ctrlPr>
-                                    </m:fPr>
-                                    <m:num>
-                                      <m:d>
-                                        <m:dPr>
-                                          <m:begChr m:val=""/>
-                                          <m:ctrlPr>
-                                            <a:rPr lang="tr-TR" i="1">
-                                              <a:solidFill>
-                                                <a:schemeClr val="bg1"/>
-                                              </a:solidFill>
-                                              <a:latin typeface="Cambria Math" panose="02040503050406030204" pitchFamily="18" charset="0"/>
-                                            </a:rPr>
-                                          </m:ctrlPr>
-                                        </m:dPr>
-                                        <m:e>
-                                          <m:r>
-                                            <m:rPr>
-                                              <m:sty m:val="p"/>
-                                            </m:rPr>
-                                            <a:rPr lang="tr-TR">
-                                              <a:solidFill>
-                                                <a:schemeClr val="bg1"/>
-                                              </a:solidFill>
-                                              <a:latin typeface="Cambria Math" panose="02040503050406030204" pitchFamily="18" charset="0"/>
-                                            </a:rPr>
-                                            <m:t>ex</m:t>
-                                          </m:r>
-                                          <m:func>
-                                            <m:funcPr>
-                                              <m:ctrlPr>
-                                                <a:rPr lang="tr-TR" i="1">
-                                                  <a:solidFill>
-                                                    <a:schemeClr val="bg1"/>
-                                                  </a:solidFill>
-                                                  <a:latin typeface="Cambria Math" panose="02040503050406030204" pitchFamily="18" charset="0"/>
-                                                </a:rPr>
-                                              </m:ctrlPr>
-                                            </m:funcPr>
-                                            <m:fName>
-                                              <m:r>
-                                                <m:rPr>
-                                                  <m:sty m:val="p"/>
-                                                </m:rPr>
-                                                <a:rPr lang="tr-TR">
-                                                  <a:solidFill>
-                                                    <a:schemeClr val="bg1"/>
-                                                  </a:solidFill>
-                                                  <a:latin typeface="Cambria Math" panose="02040503050406030204" pitchFamily="18" charset="0"/>
-                                                </a:rPr>
-                                                <m:t>p</m:t>
-                                              </m:r>
-                                            </m:fName>
-                                            <m:e>
-                                              <m:r>
-                                                <a:rPr lang="tr-TR">
-                                                  <a:solidFill>
-                                                    <a:schemeClr val="bg1"/>
-                                                  </a:solidFill>
-                                                  <a:latin typeface="Cambria Math" panose="02040503050406030204" pitchFamily="18" charset="0"/>
-                                                </a:rPr>
-                                                <m:t>(</m:t>
-                                              </m:r>
-                                            </m:e>
-                                          </m:func>
-                                          <m:r>
-                                            <a:rPr lang="tr-TR" i="1">
-                                              <a:solidFill>
-                                                <a:schemeClr val="bg1"/>
-                                              </a:solidFill>
-                                              <a:latin typeface="Cambria Math" panose="02040503050406030204" pitchFamily="18" charset="0"/>
-                                            </a:rPr>
-                                            <m:t>𝑥</m:t>
-                                          </m:r>
-                                          <m:r>
-                                            <a:rPr lang="tr-TR">
-                                              <a:solidFill>
-                                                <a:schemeClr val="bg1"/>
-                                              </a:solidFill>
-                                              <a:latin typeface="Cambria Math" panose="02040503050406030204" pitchFamily="18" charset="0"/>
-                                            </a:rPr>
-                                            <m:t>[</m:t>
-                                          </m:r>
-                                          <m:r>
-                                            <m:rPr>
-                                              <m:sty m:val="p"/>
-                                            </m:rPr>
-                                            <a:rPr lang="tr-TR" b="0" i="0" smtClean="0">
-                                              <a:solidFill>
-                                                <a:schemeClr val="bg1"/>
-                                              </a:solidFill>
-                                              <a:latin typeface="Cambria Math" panose="02040503050406030204" pitchFamily="18" charset="0"/>
-                                            </a:rPr>
-                                            <m:t>class</m:t>
-                                          </m:r>
-                                          <m:r>
-                                            <a:rPr lang="tr-TR">
-                                              <a:solidFill>
-                                                <a:schemeClr val="bg1"/>
-                                              </a:solidFill>
-                                              <a:latin typeface="Cambria Math" panose="02040503050406030204" pitchFamily="18" charset="0"/>
-                                            </a:rPr>
-                                            <m:t>]</m:t>
-                                          </m:r>
-                                        </m:e>
-                                      </m:d>
-                                    </m:num>
-                                    <m:den>
-                                      <m:nary>
-                                        <m:naryPr>
-                                          <m:chr m:val="∑"/>
-                                          <m:limLoc m:val="undOvr"/>
-                                          <m:supHide m:val="on"/>
-                                          <m:ctrlPr>
-                                            <a:rPr lang="tr-TR" i="1">
-                                              <a:solidFill>
-                                                <a:schemeClr val="bg1"/>
-                                              </a:solidFill>
-                                              <a:latin typeface="Cambria Math" panose="02040503050406030204" pitchFamily="18" charset="0"/>
-                                            </a:rPr>
-                                          </m:ctrlPr>
-                                        </m:naryPr>
-                                        <m:sub>
-                                          <m:r>
-                                            <a:rPr lang="tr-TR" i="1">
-                                              <a:solidFill>
-                                                <a:schemeClr val="bg1"/>
-                                              </a:solidFill>
-                                              <a:latin typeface="Cambria Math" panose="02040503050406030204" pitchFamily="18" charset="0"/>
-                                            </a:rPr>
-                                            <m:t>𝑗</m:t>
-                                          </m:r>
-                                        </m:sub>
-                                        <m:sup/>
-                                        <m:e>
-                                          <m:d>
-                                            <m:dPr>
-                                              <m:begChr m:val=""/>
-                                              <m:ctrlPr>
-                                                <a:rPr lang="tr-TR" i="1">
-                                                  <a:solidFill>
-                                                    <a:schemeClr val="bg1"/>
-                                                  </a:solidFill>
-                                                  <a:latin typeface="Cambria Math" panose="02040503050406030204" pitchFamily="18" charset="0"/>
-                                                </a:rPr>
-                                              </m:ctrlPr>
-                                            </m:dPr>
-                                            <m:e>
-                                              <m:r>
-                                                <m:rPr>
-                                                  <m:sty m:val="p"/>
-                                                </m:rPr>
-                                                <a:rPr lang="tr-TR">
-                                                  <a:solidFill>
-                                                    <a:schemeClr val="bg1"/>
-                                                  </a:solidFill>
-                                                  <a:latin typeface="Cambria Math" panose="02040503050406030204" pitchFamily="18" charset="0"/>
-                                                </a:rPr>
-                                                <m:t>ex</m:t>
-                                              </m:r>
-                                              <m:func>
-                                                <m:funcPr>
-                                                  <m:ctrlPr>
-                                                    <a:rPr lang="tr-TR" i="1">
-                                                      <a:solidFill>
-                                                        <a:schemeClr val="bg1"/>
-                                                      </a:solidFill>
-                                                      <a:latin typeface="Cambria Math" panose="02040503050406030204" pitchFamily="18" charset="0"/>
-                                                    </a:rPr>
-                                                  </m:ctrlPr>
-                                                </m:funcPr>
-                                                <m:fName>
-                                                  <m:r>
-                                                    <m:rPr>
-                                                      <m:sty m:val="p"/>
-                                                    </m:rPr>
-                                                    <a:rPr lang="tr-TR">
-                                                      <a:solidFill>
-                                                        <a:schemeClr val="bg1"/>
-                                                      </a:solidFill>
-                                                      <a:latin typeface="Cambria Math" panose="02040503050406030204" pitchFamily="18" charset="0"/>
-                                                    </a:rPr>
-                                                    <m:t>p</m:t>
-                                                  </m:r>
-                                                </m:fName>
-                                                <m:e>
-                                                  <m:r>
-                                                    <a:rPr lang="tr-TR">
-                                                      <a:solidFill>
-                                                        <a:schemeClr val="bg1"/>
-                                                      </a:solidFill>
-                                                      <a:latin typeface="Cambria Math" panose="02040503050406030204" pitchFamily="18" charset="0"/>
-                                                    </a:rPr>
-                                                    <m:t>(</m:t>
-                                                  </m:r>
-                                                </m:e>
-                                              </m:func>
-                                              <m:r>
-                                                <a:rPr lang="tr-TR" i="1">
-                                                  <a:solidFill>
-                                                    <a:schemeClr val="bg1"/>
-                                                  </a:solidFill>
-                                                  <a:latin typeface="Cambria Math" panose="02040503050406030204" pitchFamily="18" charset="0"/>
-                                                </a:rPr>
-                                                <m:t>𝑥</m:t>
-                                              </m:r>
-                                              <m:r>
-                                                <a:rPr lang="tr-TR">
-                                                  <a:solidFill>
-                                                    <a:schemeClr val="bg1"/>
-                                                  </a:solidFill>
-                                                  <a:latin typeface="Cambria Math" panose="02040503050406030204" pitchFamily="18" charset="0"/>
-                                                </a:rPr>
-                                                <m:t>[</m:t>
-                                              </m:r>
-                                              <m:r>
-                                                <a:rPr lang="tr-TR" i="1">
-                                                  <a:solidFill>
-                                                    <a:schemeClr val="bg1"/>
-                                                  </a:solidFill>
-                                                  <a:latin typeface="Cambria Math" panose="02040503050406030204" pitchFamily="18" charset="0"/>
-                                                </a:rPr>
-                                                <m:t>𝑗</m:t>
-                                              </m:r>
-                                              <m:r>
-                                                <a:rPr lang="tr-TR">
-                                                  <a:solidFill>
-                                                    <a:schemeClr val="bg1"/>
-                                                  </a:solidFill>
-                                                  <a:latin typeface="Cambria Math" panose="02040503050406030204" pitchFamily="18" charset="0"/>
-                                                </a:rPr>
-                                                <m:t>]</m:t>
-                                              </m:r>
-                                            </m:e>
-                                          </m:d>
-                                        </m:e>
-                                      </m:nary>
-                                    </m:den>
-                                  </m:f>
-                                  <m:r>
-                                    <a:rPr lang="tr-TR" b="0" i="1" smtClean="0">
-                                      <a:solidFill>
-                                        <a:schemeClr val="bg1"/>
-                                      </a:solidFill>
-                                      <a:latin typeface="Cambria Math" panose="02040503050406030204" pitchFamily="18" charset="0"/>
-                                    </a:rPr>
-                                    <m:t>)</m:t>
-                                  </m:r>
-                                </m:e>
-                              </m:d>
-                            </m:e>
-                          </m:nary>
-                        </m:e>
-                      </m:func>
-                    </m:oMath>
-                  </m:oMathPara>
+                  <m:oMath xmlns:m="http://schemas.openxmlformats.org/officeDocument/2006/math">
+                    <m:r>
+                      <a:rPr lang="tr-TR" i="1">
+                        <a:solidFill>
+                          <a:schemeClr val="bg1"/>
+                        </a:solidFill>
+                        <a:latin typeface="Cambria Math" panose="02040503050406030204" pitchFamily="18" charset="0"/>
+                      </a:rPr>
+                      <m:t>𝜃</m:t>
+                    </m:r>
+                  </m:oMath>
+                </a14:m>
+                <a:r>
+                  <a:rPr lang="tr-TR" dirty="0">
+                    <a:solidFill>
+                      <a:schemeClr val="bg1"/>
+                    </a:solidFill>
+                  </a:rPr>
+                  <a:t>) = </a:t>
+                </a:r>
+                <a14:m>
+                  <m:oMath xmlns:m="http://schemas.openxmlformats.org/officeDocument/2006/math">
+                    <m:func>
+                      <m:funcPr>
+                        <m:ctrlPr>
+                          <a:rPr lang="tr-TR" i="1" smtClean="0">
+                            <a:solidFill>
+                              <a:schemeClr val="bg1"/>
+                            </a:solidFill>
+                            <a:latin typeface="Cambria Math" panose="02040503050406030204" pitchFamily="18" charset="0"/>
+                          </a:rPr>
+                        </m:ctrlPr>
+                      </m:funcPr>
+                      <m:fName>
+                        <m:limLow>
+                          <m:limLowPr>
+                            <m:ctrlPr>
+                              <a:rPr lang="tr-TR" i="1">
+                                <a:solidFill>
+                                  <a:schemeClr val="bg1"/>
+                                </a:solidFill>
+                                <a:latin typeface="Cambria Math" panose="02040503050406030204" pitchFamily="18" charset="0"/>
+                              </a:rPr>
+                            </m:ctrlPr>
+                          </m:limLowPr>
+                          <m:e>
+                            <m:r>
+                              <m:rPr>
+                                <m:sty m:val="p"/>
+                              </m:rPr>
+                              <a:rPr lang="tr-TR">
+                                <a:solidFill>
+                                  <a:schemeClr val="bg1"/>
+                                </a:solidFill>
+                                <a:latin typeface="Cambria Math" panose="02040503050406030204" pitchFamily="18" charset="0"/>
+                              </a:rPr>
+                              <m:t>min</m:t>
+                            </m:r>
+                          </m:e>
+                          <m:lim>
+                            <m:r>
+                              <a:rPr lang="tr-TR" i="1">
+                                <a:solidFill>
+                                  <a:schemeClr val="bg1"/>
+                                </a:solidFill>
+                                <a:latin typeface="Cambria Math" panose="02040503050406030204" pitchFamily="18" charset="0"/>
+                              </a:rPr>
+                              <m:t>𝜃</m:t>
+                            </m:r>
+                          </m:lim>
+                        </m:limLow>
+                      </m:fName>
+                      <m:e>
+                        <m:nary>
+                          <m:naryPr>
+                            <m:chr m:val="∑"/>
+                            <m:limLoc m:val="undOvr"/>
+                            <m:supHide m:val="on"/>
+                            <m:ctrlPr>
+                              <a:rPr lang="tr-TR" i="1">
+                                <a:solidFill>
+                                  <a:schemeClr val="bg1"/>
+                                </a:solidFill>
+                                <a:latin typeface="Cambria Math" panose="02040503050406030204" pitchFamily="18" charset="0"/>
+                              </a:rPr>
+                            </m:ctrlPr>
+                          </m:naryPr>
+                          <m:sub>
+                            <m:d>
+                              <m:dPr>
+                                <m:ctrlPr>
+                                  <a:rPr lang="tr-TR" i="1">
+                                    <a:solidFill>
+                                      <a:schemeClr val="bg1"/>
+                                    </a:solidFill>
+                                    <a:latin typeface="Cambria Math" panose="02040503050406030204" pitchFamily="18" charset="0"/>
+                                  </a:rPr>
+                                </m:ctrlPr>
+                              </m:dPr>
+                              <m:e>
+                                <m:r>
+                                  <a:rPr lang="tr-TR" i="1">
+                                    <a:solidFill>
+                                      <a:schemeClr val="bg1"/>
+                                    </a:solidFill>
+                                    <a:latin typeface="Cambria Math" panose="02040503050406030204" pitchFamily="18" charset="0"/>
+                                  </a:rPr>
+                                  <m:t>𝑥</m:t>
+                                </m:r>
+                                <m:r>
+                                  <a:rPr lang="tr-TR" i="0">
+                                    <a:solidFill>
+                                      <a:schemeClr val="bg1"/>
+                                    </a:solidFill>
+                                    <a:latin typeface="Cambria Math" panose="02040503050406030204" pitchFamily="18" charset="0"/>
+                                  </a:rPr>
+                                  <m:t>,</m:t>
+                                </m:r>
+                                <m:r>
+                                  <a:rPr lang="tr-TR" b="0" i="1" smtClean="0">
+                                    <a:solidFill>
+                                      <a:schemeClr val="bg1"/>
+                                    </a:solidFill>
+                                    <a:latin typeface="Cambria Math" panose="02040503050406030204" pitchFamily="18" charset="0"/>
+                                  </a:rPr>
+                                  <m:t>𝑦</m:t>
+                                </m:r>
+                              </m:e>
+                            </m:d>
+                          </m:sub>
+                          <m:sup/>
+                          <m:e>
+                            <m:d>
+                              <m:dPr>
+                                <m:ctrlPr>
+                                  <a:rPr lang="tr-TR" i="1">
+                                    <a:solidFill>
+                                      <a:schemeClr val="bg1"/>
+                                    </a:solidFill>
+                                    <a:latin typeface="Cambria Math" panose="02040503050406030204" pitchFamily="18" charset="0"/>
+                                  </a:rPr>
+                                </m:ctrlPr>
+                              </m:dPr>
+                              <m:e>
+                                <m:r>
+                                  <a:rPr lang="tr-TR">
+                                    <a:solidFill>
+                                      <a:schemeClr val="bg1"/>
+                                    </a:solidFill>
+                                    <a:latin typeface="Cambria Math" panose="02040503050406030204" pitchFamily="18" charset="0"/>
+                                  </a:rPr>
+                                  <m:t>−</m:t>
+                                </m:r>
+                                <m:r>
+                                  <m:rPr>
+                                    <m:sty m:val="p"/>
+                                  </m:rPr>
+                                  <a:rPr lang="tr-TR">
+                                    <a:solidFill>
+                                      <a:schemeClr val="bg1"/>
+                                    </a:solidFill>
+                                    <a:latin typeface="Cambria Math" panose="02040503050406030204" pitchFamily="18" charset="0"/>
+                                  </a:rPr>
+                                  <m:t>lo</m:t>
+                                </m:r>
+                                <m:func>
+                                  <m:funcPr>
+                                    <m:ctrlPr>
+                                      <a:rPr lang="tr-TR" i="1">
+                                        <a:solidFill>
+                                          <a:schemeClr val="bg1"/>
+                                        </a:solidFill>
+                                        <a:latin typeface="Cambria Math" panose="02040503050406030204" pitchFamily="18" charset="0"/>
+                                      </a:rPr>
+                                    </m:ctrlPr>
+                                  </m:funcPr>
+                                  <m:fName>
+                                    <m:r>
+                                      <m:rPr>
+                                        <m:sty m:val="p"/>
+                                      </m:rPr>
+                                      <a:rPr lang="tr-TR">
+                                        <a:solidFill>
+                                          <a:schemeClr val="bg1"/>
+                                        </a:solidFill>
+                                        <a:latin typeface="Cambria Math" panose="02040503050406030204" pitchFamily="18" charset="0"/>
+                                      </a:rPr>
+                                      <m:t>g</m:t>
+                                    </m:r>
+                                  </m:fName>
+                                  <m:e>
+                                    <m:r>
+                                      <a:rPr lang="tr-TR">
+                                        <a:solidFill>
+                                          <a:schemeClr val="bg1"/>
+                                        </a:solidFill>
+                                        <a:latin typeface="Cambria Math" panose="02040503050406030204" pitchFamily="18" charset="0"/>
+                                      </a:rPr>
+                                      <m:t>(</m:t>
+                                    </m:r>
+                                  </m:e>
+                                </m:func>
+                                <m:f>
+                                  <m:fPr>
+                                    <m:ctrlPr>
+                                      <a:rPr lang="tr-TR" i="1">
+                                        <a:solidFill>
+                                          <a:schemeClr val="bg1"/>
+                                        </a:solidFill>
+                                        <a:latin typeface="Cambria Math" panose="02040503050406030204" pitchFamily="18" charset="0"/>
+                                      </a:rPr>
+                                    </m:ctrlPr>
+                                  </m:fPr>
+                                  <m:num>
+                                    <m:d>
+                                      <m:dPr>
+                                        <m:begChr m:val=""/>
+                                        <m:ctrlPr>
+                                          <a:rPr lang="tr-TR" i="1">
+                                            <a:solidFill>
+                                              <a:schemeClr val="bg1"/>
+                                            </a:solidFill>
+                                            <a:latin typeface="Cambria Math" panose="02040503050406030204" pitchFamily="18" charset="0"/>
+                                          </a:rPr>
+                                        </m:ctrlPr>
+                                      </m:dPr>
+                                      <m:e>
+                                        <m:r>
+                                          <m:rPr>
+                                            <m:sty m:val="p"/>
+                                          </m:rPr>
+                                          <a:rPr lang="tr-TR">
+                                            <a:solidFill>
+                                              <a:schemeClr val="bg1"/>
+                                            </a:solidFill>
+                                            <a:latin typeface="Cambria Math" panose="02040503050406030204" pitchFamily="18" charset="0"/>
+                                          </a:rPr>
+                                          <m:t>ex</m:t>
+                                        </m:r>
+                                        <m:func>
+                                          <m:funcPr>
+                                            <m:ctrlPr>
+                                              <a:rPr lang="tr-TR" i="1">
+                                                <a:solidFill>
+                                                  <a:schemeClr val="bg1"/>
+                                                </a:solidFill>
+                                                <a:latin typeface="Cambria Math" panose="02040503050406030204" pitchFamily="18" charset="0"/>
+                                              </a:rPr>
+                                            </m:ctrlPr>
+                                          </m:funcPr>
+                                          <m:fName>
+                                            <m:r>
+                                              <m:rPr>
+                                                <m:sty m:val="p"/>
+                                              </m:rPr>
+                                              <a:rPr lang="tr-TR">
+                                                <a:solidFill>
+                                                  <a:schemeClr val="bg1"/>
+                                                </a:solidFill>
+                                                <a:latin typeface="Cambria Math" panose="02040503050406030204" pitchFamily="18" charset="0"/>
+                                              </a:rPr>
+                                              <m:t>p</m:t>
+                                            </m:r>
+                                          </m:fName>
+                                          <m:e>
+                                            <m:r>
+                                              <a:rPr lang="tr-TR">
+                                                <a:solidFill>
+                                                  <a:schemeClr val="bg1"/>
+                                                </a:solidFill>
+                                                <a:latin typeface="Cambria Math" panose="02040503050406030204" pitchFamily="18" charset="0"/>
+                                              </a:rPr>
+                                              <m:t>(</m:t>
+                                            </m:r>
+                                          </m:e>
+                                        </m:func>
+                                        <m:r>
+                                          <a:rPr lang="tr-TR" i="1">
+                                            <a:solidFill>
+                                              <a:schemeClr val="bg1"/>
+                                            </a:solidFill>
+                                            <a:latin typeface="Cambria Math" panose="02040503050406030204" pitchFamily="18" charset="0"/>
+                                          </a:rPr>
+                                          <m:t>𝑥</m:t>
+                                        </m:r>
+                                        <m:r>
+                                          <a:rPr lang="tr-TR">
+                                            <a:solidFill>
+                                              <a:schemeClr val="bg1"/>
+                                            </a:solidFill>
+                                            <a:latin typeface="Cambria Math" panose="02040503050406030204" pitchFamily="18" charset="0"/>
+                                          </a:rPr>
+                                          <m:t>[</m:t>
+                                        </m:r>
+                                        <m:r>
+                                          <m:rPr>
+                                            <m:sty m:val="p"/>
+                                          </m:rPr>
+                                          <a:rPr lang="tr-TR" b="0" i="0" smtClean="0">
+                                            <a:solidFill>
+                                              <a:schemeClr val="bg1"/>
+                                            </a:solidFill>
+                                            <a:latin typeface="Cambria Math" panose="02040503050406030204" pitchFamily="18" charset="0"/>
+                                          </a:rPr>
+                                          <m:t>class</m:t>
+                                        </m:r>
+                                        <m:r>
+                                          <a:rPr lang="tr-TR">
+                                            <a:solidFill>
+                                              <a:schemeClr val="bg1"/>
+                                            </a:solidFill>
+                                            <a:latin typeface="Cambria Math" panose="02040503050406030204" pitchFamily="18" charset="0"/>
+                                          </a:rPr>
+                                          <m:t>]</m:t>
+                                        </m:r>
+                                      </m:e>
+                                    </m:d>
+                                  </m:num>
+                                  <m:den>
+                                    <m:nary>
+                                      <m:naryPr>
+                                        <m:chr m:val="∑"/>
+                                        <m:limLoc m:val="undOvr"/>
+                                        <m:supHide m:val="on"/>
+                                        <m:ctrlPr>
+                                          <a:rPr lang="tr-TR" i="1">
+                                            <a:solidFill>
+                                              <a:schemeClr val="bg1"/>
+                                            </a:solidFill>
+                                            <a:latin typeface="Cambria Math" panose="02040503050406030204" pitchFamily="18" charset="0"/>
+                                          </a:rPr>
+                                        </m:ctrlPr>
+                                      </m:naryPr>
+                                      <m:sub>
+                                        <m:r>
+                                          <a:rPr lang="tr-TR" i="1">
+                                            <a:solidFill>
+                                              <a:schemeClr val="bg1"/>
+                                            </a:solidFill>
+                                            <a:latin typeface="Cambria Math" panose="02040503050406030204" pitchFamily="18" charset="0"/>
+                                          </a:rPr>
+                                          <m:t>𝑗</m:t>
+                                        </m:r>
+                                      </m:sub>
+                                      <m:sup/>
+                                      <m:e>
+                                        <m:d>
+                                          <m:dPr>
+                                            <m:begChr m:val=""/>
+                                            <m:ctrlPr>
+                                              <a:rPr lang="tr-TR" i="1">
+                                                <a:solidFill>
+                                                  <a:schemeClr val="bg1"/>
+                                                </a:solidFill>
+                                                <a:latin typeface="Cambria Math" panose="02040503050406030204" pitchFamily="18" charset="0"/>
+                                              </a:rPr>
+                                            </m:ctrlPr>
+                                          </m:dPr>
+                                          <m:e>
+                                            <m:r>
+                                              <m:rPr>
+                                                <m:sty m:val="p"/>
+                                              </m:rPr>
+                                              <a:rPr lang="tr-TR">
+                                                <a:solidFill>
+                                                  <a:schemeClr val="bg1"/>
+                                                </a:solidFill>
+                                                <a:latin typeface="Cambria Math" panose="02040503050406030204" pitchFamily="18" charset="0"/>
+                                              </a:rPr>
+                                              <m:t>ex</m:t>
+                                            </m:r>
+                                            <m:func>
+                                              <m:funcPr>
+                                                <m:ctrlPr>
+                                                  <a:rPr lang="tr-TR" i="1">
+                                                    <a:solidFill>
+                                                      <a:schemeClr val="bg1"/>
+                                                    </a:solidFill>
+                                                    <a:latin typeface="Cambria Math" panose="02040503050406030204" pitchFamily="18" charset="0"/>
+                                                  </a:rPr>
+                                                </m:ctrlPr>
+                                              </m:funcPr>
+                                              <m:fName>
+                                                <m:r>
+                                                  <m:rPr>
+                                                    <m:sty m:val="p"/>
+                                                  </m:rPr>
+                                                  <a:rPr lang="tr-TR">
+                                                    <a:solidFill>
+                                                      <a:schemeClr val="bg1"/>
+                                                    </a:solidFill>
+                                                    <a:latin typeface="Cambria Math" panose="02040503050406030204" pitchFamily="18" charset="0"/>
+                                                  </a:rPr>
+                                                  <m:t>p</m:t>
+                                                </m:r>
+                                              </m:fName>
+                                              <m:e>
+                                                <m:r>
+                                                  <a:rPr lang="tr-TR">
+                                                    <a:solidFill>
+                                                      <a:schemeClr val="bg1"/>
+                                                    </a:solidFill>
+                                                    <a:latin typeface="Cambria Math" panose="02040503050406030204" pitchFamily="18" charset="0"/>
+                                                  </a:rPr>
+                                                  <m:t>(</m:t>
+                                                </m:r>
+                                              </m:e>
+                                            </m:func>
+                                            <m:r>
+                                              <a:rPr lang="tr-TR" i="1">
+                                                <a:solidFill>
+                                                  <a:schemeClr val="bg1"/>
+                                                </a:solidFill>
+                                                <a:latin typeface="Cambria Math" panose="02040503050406030204" pitchFamily="18" charset="0"/>
+                                              </a:rPr>
+                                              <m:t>𝑥</m:t>
+                                            </m:r>
+                                            <m:r>
+                                              <a:rPr lang="tr-TR">
+                                                <a:solidFill>
+                                                  <a:schemeClr val="bg1"/>
+                                                </a:solidFill>
+                                                <a:latin typeface="Cambria Math" panose="02040503050406030204" pitchFamily="18" charset="0"/>
+                                              </a:rPr>
+                                              <m:t>[</m:t>
+                                            </m:r>
+                                            <m:r>
+                                              <a:rPr lang="tr-TR" i="1">
+                                                <a:solidFill>
+                                                  <a:schemeClr val="bg1"/>
+                                                </a:solidFill>
+                                                <a:latin typeface="Cambria Math" panose="02040503050406030204" pitchFamily="18" charset="0"/>
+                                              </a:rPr>
+                                              <m:t>𝑗</m:t>
+                                            </m:r>
+                                            <m:r>
+                                              <a:rPr lang="tr-TR">
+                                                <a:solidFill>
+                                                  <a:schemeClr val="bg1"/>
+                                                </a:solidFill>
+                                                <a:latin typeface="Cambria Math" panose="02040503050406030204" pitchFamily="18" charset="0"/>
+                                              </a:rPr>
+                                              <m:t>]</m:t>
+                                            </m:r>
+                                          </m:e>
+                                        </m:d>
+                                      </m:e>
+                                    </m:nary>
+                                  </m:den>
+                                </m:f>
+                                <m:r>
+                                  <a:rPr lang="tr-TR" b="0" i="1" smtClean="0">
+                                    <a:solidFill>
+                                      <a:schemeClr val="bg1"/>
+                                    </a:solidFill>
+                                    <a:latin typeface="Cambria Math" panose="02040503050406030204" pitchFamily="18" charset="0"/>
+                                  </a:rPr>
+                                  <m:t>)</m:t>
+                                </m:r>
+                              </m:e>
+                            </m:d>
+                          </m:e>
+                        </m:nary>
+                      </m:e>
+                    </m:func>
+                  </m:oMath>
                 </a14:m>
                 <a:endParaRPr lang="tr-TR" dirty="0">
                   <a:solidFill>
@@ -14647,7 +14863,7 @@
             </p:txBody>
           </p:sp>
         </mc:Choice>
-        <mc:Fallback xmlns="">
+        <mc:Fallback>
           <p:sp>
             <p:nvSpPr>
               <p:cNvPr id="6" name="Dikdörtgen 5">
@@ -14664,8 +14880,8 @@
             </p:nvSpPr>
             <p:spPr>
               <a:xfrm>
-                <a:off x="4523248" y="1037495"/>
-                <a:ext cx="3491597" cy="814197"/>
+                <a:off x="4501982" y="1037495"/>
+                <a:ext cx="3903056" cy="619978"/>
               </a:xfrm>
               <a:prstGeom prst="rect">
                 <a:avLst/>
@@ -14673,7 +14889,7 @@
               <a:blipFill>
                 <a:blip r:embed="rId5"/>
                 <a:stretch>
-                  <a:fillRect l="-7609" t="-110769" b="-156923"/>
+                  <a:fillRect l="-1299" t="-48000" b="-78000"/>
                 </a:stretch>
               </a:blipFill>
             </p:spPr>
@@ -14682,7 +14898,7 @@
               <a:lstStyle/>
               <a:p>
                 <a:r>
-                  <a:rPr lang="tr-TR">
+                  <a:rPr lang="en-US">
                     <a:noFill/>
                   </a:rPr>
                   <a:t> </a:t>
@@ -14692,8 +14908,8 @@
           </p:sp>
         </mc:Fallback>
       </mc:AlternateContent>
-      <mc:AlternateContent xmlns:mc="http://schemas.openxmlformats.org/markup-compatibility/2006">
-        <mc:Choice xmlns:a14="http://schemas.microsoft.com/office/drawing/2010/main" Requires="a14">
+      <mc:AlternateContent xmlns:mc="http://schemas.openxmlformats.org/markup-compatibility/2006" xmlns:a14="http://schemas.microsoft.com/office/drawing/2010/main">
+        <mc:Choice Requires="a14">
           <p:sp>
             <p:nvSpPr>
               <p:cNvPr id="4" name="Dikdörtgen 3">
@@ -14726,6 +14942,7 @@
               </a:bodyPr>
               <a:lstStyle/>
               <a:p>
+                <a:pPr/>
                 <a14:m>
                   <m:oMathPara xmlns:m="http://schemas.openxmlformats.org/officeDocument/2006/math">
                     <m:oMathParaPr>
@@ -16274,7 +16491,7 @@
             </p:txBody>
           </p:sp>
         </mc:Choice>
-        <mc:Fallback>
+        <mc:Fallback xmlns="">
           <p:sp>
             <p:nvSpPr>
               <p:cNvPr id="4" name="Dikdörtgen 3">
@@ -16482,8 +16699,8 @@
           </a:fontRef>
         </p:style>
       </p:cxnSp>
-      <mc:AlternateContent xmlns:mc="http://schemas.openxmlformats.org/markup-compatibility/2006">
-        <mc:Choice xmlns:a14="http://schemas.microsoft.com/office/drawing/2010/main" Requires="a14">
+      <mc:AlternateContent xmlns:mc="http://schemas.openxmlformats.org/markup-compatibility/2006" xmlns:a14="http://schemas.microsoft.com/office/drawing/2010/main">
+        <mc:Choice Requires="a14">
           <p:sp>
             <p:nvSpPr>
               <p:cNvPr id="12" name="Rectangle 11">
@@ -16549,7 +16766,7 @@
             </p:txBody>
           </p:sp>
         </mc:Choice>
-        <mc:Fallback>
+        <mc:Fallback xmlns="">
           <p:sp>
             <p:nvSpPr>
               <p:cNvPr id="12" name="Rectangle 11">
@@ -16633,8 +16850,8 @@
           </a:fontRef>
         </p:style>
       </p:cxnSp>
-      <mc:AlternateContent xmlns:mc="http://schemas.openxmlformats.org/markup-compatibility/2006">
-        <mc:Choice xmlns:a14="http://schemas.microsoft.com/office/drawing/2010/main" Requires="a14">
+      <mc:AlternateContent xmlns:mc="http://schemas.openxmlformats.org/markup-compatibility/2006" xmlns:a14="http://schemas.microsoft.com/office/drawing/2010/main">
+        <mc:Choice Requires="a14">
           <p:sp>
             <p:nvSpPr>
               <p:cNvPr id="14" name="Rectangle 13">
@@ -16735,7 +16952,7 @@
             </p:txBody>
           </p:sp>
         </mc:Choice>
-        <mc:Fallback>
+        <mc:Fallback xmlns="">
           <p:sp>
             <p:nvSpPr>
               <p:cNvPr id="14" name="Rectangle 13">
@@ -16819,8 +17036,8 @@
           </a:fontRef>
         </p:style>
       </p:cxnSp>
-      <mc:AlternateContent xmlns:mc="http://schemas.openxmlformats.org/markup-compatibility/2006">
-        <mc:Choice xmlns:a14="http://schemas.microsoft.com/office/drawing/2010/main" Requires="a14">
+      <mc:AlternateContent xmlns:mc="http://schemas.openxmlformats.org/markup-compatibility/2006" xmlns:a14="http://schemas.microsoft.com/office/drawing/2010/main">
+        <mc:Choice Requires="a14">
           <p:sp>
             <p:nvSpPr>
               <p:cNvPr id="16" name="Rectangle 15">
@@ -16962,16 +17179,7 @@
                             </a:solidFill>
                             <a:latin typeface="Cambria Math" panose="02040503050406030204" pitchFamily="18" charset="0"/>
                           </a:rPr>
-                          <m:t>1</m:t>
-                        </m:r>
-                        <m:r>
-                          <a:rPr lang="tr-TR" sz="1400" i="1">
-                            <a:solidFill>
-                              <a:schemeClr val="tx1"/>
-                            </a:solidFill>
-                            <a:latin typeface="Cambria Math" panose="02040503050406030204" pitchFamily="18" charset="0"/>
-                          </a:rPr>
-                          <m:t>,2</m:t>
+                          <m:t>1,2</m:t>
                         </m:r>
                       </m:sub>
                     </m:sSub>
@@ -16989,7 +17197,7 @@
             </p:txBody>
           </p:sp>
         </mc:Choice>
-        <mc:Fallback>
+        <mc:Fallback xmlns="">
           <p:sp>
             <p:nvSpPr>
               <p:cNvPr id="16" name="Rectangle 15">
